--- a/sales-materials/EnerCalculatie-klantpresentatie.pptx
+++ b/sales-materials/EnerCalculatie-klantpresentatie.pptx
@@ -1856,7 +1856,7 @@
       </p:grpSpPr>
       <p:pic>
         <p:nvPicPr>
-          <p:cNvPr id="2" name="Image 0" descr="/private/tmp/pptx-gen/logo-white.png">    </p:cNvPr>
+          <p:cNvPr id="2" name="Image 0" descr="/private/tmp/pptx-fix/logo-white.png">    </p:cNvPr>
           <p:cNvPicPr>
             <a:picLocks noChangeAspect="1"/>
           </p:cNvPicPr>
@@ -2052,7 +2052,7 @@
       </p:grpSpPr>
       <p:pic>
         <p:nvPicPr>
-          <p:cNvPr id="2" name="Image 0" descr="/private/tmp/pptx-gen/logo.png">    </p:cNvPr>
+          <p:cNvPr id="2" name="Image 0" descr="/private/tmp/pptx-fix/logo.png">    </p:cNvPr>
           <p:cNvPicPr>
             <a:picLocks noChangeAspect="1"/>
           </p:cNvPicPr>
@@ -2617,7 +2617,7 @@
                 <a:ea typeface="Arial" pitchFamily="34" charset="-122"/>
                 <a:cs typeface="Arial" pitchFamily="34" charset="-120"/>
               </a:rPr>
-              <a:t>Alle pakketten: 14 dagen gratis proefperiode, maandelijks opzegbaar, prijzen excl. btw.</a:t>
+              <a:t>Alle pakketten: 30 dagen gratis proefperiode, maandelijks opzegbaar, prijzen excl. btw.</a:t>
             </a:r>
             <a:endParaRPr lang="en-US" sz="1200" dirty="0"/>
           </a:p>
@@ -2735,7 +2735,7 @@
       </p:grpSpPr>
       <p:pic>
         <p:nvPicPr>
-          <p:cNvPr id="2" name="Image 0" descr="/private/tmp/pptx-gen/logo-white.png">    </p:cNvPr>
+          <p:cNvPr id="2" name="Image 0" descr="/private/tmp/pptx-fix/logo-white.png">    </p:cNvPr>
           <p:cNvPicPr>
             <a:picLocks noChangeAspect="1"/>
           </p:cNvPicPr>
@@ -2986,7 +2986,7 @@
       </p:grpSpPr>
       <p:pic>
         <p:nvPicPr>
-          <p:cNvPr id="2" name="Image 0" descr="/private/tmp/pptx-gen/logo.png">    </p:cNvPr>
+          <p:cNvPr id="2" name="Image 0" descr="/private/tmp/pptx-fix/logo.png">    </p:cNvPr>
           <p:cNvPicPr>
             <a:picLocks noChangeAspect="1"/>
           </p:cNvPicPr>
@@ -3087,7 +3087,7 @@
                 <a:ea typeface="Arial" pitchFamily="34" charset="-122"/>
                 <a:cs typeface="Arial" pitchFamily="34" charset="-120"/>
               </a:rPr>
-              <a:t>Start een 14 dagen gratis proefperiode — geen verplichtingen</a:t>
+              <a:t>Start een 30 dagen gratis proefperiode — geen verplichtingen</a:t>
             </a:r>
             <a:endParaRPr lang="en-US" sz="1800" dirty="0"/>
           </a:p>
@@ -3358,7 +3358,7 @@
       </p:grpSpPr>
       <p:pic>
         <p:nvPicPr>
-          <p:cNvPr id="2" name="Image 0" descr="/private/tmp/pptx-gen/logo.png">    </p:cNvPr>
+          <p:cNvPr id="2" name="Image 0" descr="/private/tmp/pptx-fix/logo.png">    </p:cNvPr>
           <p:cNvPicPr>
             <a:picLocks noChangeAspect="1"/>
           </p:cNvPicPr>
@@ -3649,7 +3649,7 @@
       </p:grpSpPr>
       <p:pic>
         <p:nvPicPr>
-          <p:cNvPr id="2" name="Image 0" descr="/private/tmp/pptx-gen/logo-white.png">    </p:cNvPr>
+          <p:cNvPr id="2" name="Image 0" descr="/private/tmp/pptx-fix/logo-white.png">    </p:cNvPr>
           <p:cNvPicPr>
             <a:picLocks noChangeAspect="1"/>
           </p:cNvPicPr>
@@ -3984,7 +3984,7 @@
       </p:grpSpPr>
       <p:pic>
         <p:nvPicPr>
-          <p:cNvPr id="2" name="Image 0" descr="/private/tmp/pptx-gen/logo.png">    </p:cNvPr>
+          <p:cNvPr id="2" name="Image 0" descr="/private/tmp/pptx-fix/logo.png">    </p:cNvPr>
           <p:cNvPicPr>
             <a:picLocks noChangeAspect="1"/>
           </p:cNvPicPr>
@@ -4628,7 +4628,7 @@
       </p:grpSpPr>
       <p:pic>
         <p:nvPicPr>
-          <p:cNvPr id="2" name="Image 0" descr="/private/tmp/pptx-gen/logo.png">    </p:cNvPr>
+          <p:cNvPr id="2" name="Image 0" descr="/private/tmp/pptx-fix/logo.png">    </p:cNvPr>
           <p:cNvPicPr>
             <a:picLocks noChangeAspect="1"/>
           </p:cNvPicPr>
@@ -5170,7 +5170,7 @@
       </p:grpSpPr>
       <p:pic>
         <p:nvPicPr>
-          <p:cNvPr id="2" name="Image 0" descr="/private/tmp/pptx-gen/logo-white.png">    </p:cNvPr>
+          <p:cNvPr id="2" name="Image 0" descr="/private/tmp/pptx-fix/logo-white.png">    </p:cNvPr>
           <p:cNvPicPr>
             <a:picLocks noChangeAspect="1"/>
           </p:cNvPicPr>
@@ -5304,7 +5304,7 @@
       </p:grpSpPr>
       <p:pic>
         <p:nvPicPr>
-          <p:cNvPr id="2" name="Image 0" descr="/private/tmp/pptx-gen/logo.png">    </p:cNvPr>
+          <p:cNvPr id="2" name="Image 0" descr="/private/tmp/pptx-fix/logo.png">    </p:cNvPr>
           <p:cNvPicPr>
             <a:picLocks noChangeAspect="1"/>
           </p:cNvPicPr>
@@ -5595,7 +5595,7 @@
       </p:grpSpPr>
       <p:pic>
         <p:nvPicPr>
-          <p:cNvPr id="2" name="Image 0" descr="/private/tmp/pptx-gen/logo.png">    </p:cNvPr>
+          <p:cNvPr id="2" name="Image 0" descr="/private/tmp/pptx-fix/logo.png">    </p:cNvPr>
           <p:cNvPicPr>
             <a:picLocks noChangeAspect="1"/>
           </p:cNvPicPr>
@@ -6083,7 +6083,7 @@
       </p:grpSpPr>
       <p:pic>
         <p:nvPicPr>
-          <p:cNvPr id="2" name="Image 0" descr="/private/tmp/pptx-gen/logo.png">    </p:cNvPr>
+          <p:cNvPr id="2" name="Image 0" descr="/private/tmp/pptx-fix/logo.png">    </p:cNvPr>
           <p:cNvPicPr>
             <a:picLocks noChangeAspect="1"/>
           </p:cNvPicPr>

--- a/sales-materials/EnerCalculatie-klantpresentatie.pptx
+++ b/sales-materials/EnerCalculatie-klantpresentatie.pptx
@@ -1856,7 +1856,7 @@
       </p:grpSpPr>
       <p:pic>
         <p:nvPicPr>
-          <p:cNvPr id="2" name="Image 0" descr="/private/tmp/pptx-fix/logo-white.png">    </p:cNvPr>
+          <p:cNvPr id="2" name="Image 0" descr="/private/tmp/pptx-rename/logo-white.png">    </p:cNvPr>
           <p:cNvPicPr>
             <a:picLocks noChangeAspect="1"/>
           </p:cNvPicPr>
@@ -2052,7 +2052,7 @@
       </p:grpSpPr>
       <p:pic>
         <p:nvPicPr>
-          <p:cNvPr id="2" name="Image 0" descr="/private/tmp/pptx-fix/logo.png">    </p:cNvPr>
+          <p:cNvPr id="2" name="Image 0" descr="/private/tmp/pptx-rename/logo.png">    </p:cNvPr>
           <p:cNvPicPr>
             <a:picLocks noChangeAspect="1"/>
           </p:cNvPicPr>
@@ -2173,7 +2173,7 @@
                 <a:ea typeface="Arial" pitchFamily="34" charset="-122"/>
                 <a:cs typeface="Arial" pitchFamily="34" charset="-120"/>
               </a:rPr>
-              <a:t>Solo</a:t>
+              <a:t>Business</a:t>
             </a:r>
             <a:endParaRPr lang="en-US" sz="2000" dirty="0"/>
           </a:p>
@@ -2434,7 +2434,7 @@
                 <a:ea typeface="Arial" pitchFamily="34" charset="-122"/>
                 <a:cs typeface="Arial" pitchFamily="34" charset="-120"/>
               </a:rPr>
-              <a:t>Alles uit Solo + warmtepomp + technische opname</a:t>
+              <a:t>Alles uit Business + warmtepomp + technische opname</a:t>
             </a:r>
             <a:endParaRPr lang="en-US" sz="1300" dirty="0"/>
           </a:p>
@@ -2735,7 +2735,7 @@
       </p:grpSpPr>
       <p:pic>
         <p:nvPicPr>
-          <p:cNvPr id="2" name="Image 0" descr="/private/tmp/pptx-fix/logo-white.png">    </p:cNvPr>
+          <p:cNvPr id="2" name="Image 0" descr="/private/tmp/pptx-rename/logo-white.png">    </p:cNvPr>
           <p:cNvPicPr>
             <a:picLocks noChangeAspect="1"/>
           </p:cNvPicPr>
@@ -2986,7 +2986,7 @@
       </p:grpSpPr>
       <p:pic>
         <p:nvPicPr>
-          <p:cNvPr id="2" name="Image 0" descr="/private/tmp/pptx-fix/logo.png">    </p:cNvPr>
+          <p:cNvPr id="2" name="Image 0" descr="/private/tmp/pptx-rename/logo.png">    </p:cNvPr>
           <p:cNvPicPr>
             <a:picLocks noChangeAspect="1"/>
           </p:cNvPicPr>
@@ -3358,7 +3358,7 @@
       </p:grpSpPr>
       <p:pic>
         <p:nvPicPr>
-          <p:cNvPr id="2" name="Image 0" descr="/private/tmp/pptx-fix/logo.png">    </p:cNvPr>
+          <p:cNvPr id="2" name="Image 0" descr="/private/tmp/pptx-rename/logo.png">    </p:cNvPr>
           <p:cNvPicPr>
             <a:picLocks noChangeAspect="1"/>
           </p:cNvPicPr>
@@ -3649,7 +3649,7 @@
       </p:grpSpPr>
       <p:pic>
         <p:nvPicPr>
-          <p:cNvPr id="2" name="Image 0" descr="/private/tmp/pptx-fix/logo-white.png">    </p:cNvPr>
+          <p:cNvPr id="2" name="Image 0" descr="/private/tmp/pptx-rename/logo-white.png">    </p:cNvPr>
           <p:cNvPicPr>
             <a:picLocks noChangeAspect="1"/>
           </p:cNvPicPr>
@@ -3984,7 +3984,7 @@
       </p:grpSpPr>
       <p:pic>
         <p:nvPicPr>
-          <p:cNvPr id="2" name="Image 0" descr="/private/tmp/pptx-fix/logo.png">    </p:cNvPr>
+          <p:cNvPr id="2" name="Image 0" descr="/private/tmp/pptx-rename/logo.png">    </p:cNvPr>
           <p:cNvPicPr>
             <a:picLocks noChangeAspect="1"/>
           </p:cNvPicPr>
@@ -4628,7 +4628,7 @@
       </p:grpSpPr>
       <p:pic>
         <p:nvPicPr>
-          <p:cNvPr id="2" name="Image 0" descr="/private/tmp/pptx-fix/logo.png">    </p:cNvPr>
+          <p:cNvPr id="2" name="Image 0" descr="/private/tmp/pptx-rename/logo.png">    </p:cNvPr>
           <p:cNvPicPr>
             <a:picLocks noChangeAspect="1"/>
           </p:cNvPicPr>
@@ -5170,7 +5170,7 @@
       </p:grpSpPr>
       <p:pic>
         <p:nvPicPr>
-          <p:cNvPr id="2" name="Image 0" descr="/private/tmp/pptx-fix/logo-white.png">    </p:cNvPr>
+          <p:cNvPr id="2" name="Image 0" descr="/private/tmp/pptx-rename/logo-white.png">    </p:cNvPr>
           <p:cNvPicPr>
             <a:picLocks noChangeAspect="1"/>
           </p:cNvPicPr>
@@ -5304,7 +5304,7 @@
       </p:grpSpPr>
       <p:pic>
         <p:nvPicPr>
-          <p:cNvPr id="2" name="Image 0" descr="/private/tmp/pptx-fix/logo.png">    </p:cNvPr>
+          <p:cNvPr id="2" name="Image 0" descr="/private/tmp/pptx-rename/logo.png">    </p:cNvPr>
           <p:cNvPicPr>
             <a:picLocks noChangeAspect="1"/>
           </p:cNvPicPr>
@@ -5595,7 +5595,7 @@
       </p:grpSpPr>
       <p:pic>
         <p:nvPicPr>
-          <p:cNvPr id="2" name="Image 0" descr="/private/tmp/pptx-fix/logo.png">    </p:cNvPr>
+          <p:cNvPr id="2" name="Image 0" descr="/private/tmp/pptx-rename/logo.png">    </p:cNvPr>
           <p:cNvPicPr>
             <a:picLocks noChangeAspect="1"/>
           </p:cNvPicPr>
@@ -6083,7 +6083,7 @@
       </p:grpSpPr>
       <p:pic>
         <p:nvPicPr>
-          <p:cNvPr id="2" name="Image 0" descr="/private/tmp/pptx-fix/logo.png">    </p:cNvPr>
+          <p:cNvPr id="2" name="Image 0" descr="/private/tmp/pptx-rename/logo.png">    </p:cNvPr>
           <p:cNvPicPr>
             <a:picLocks noChangeAspect="1"/>
           </p:cNvPicPr>
